--- a/week11/Lecture11.pptx
+++ b/week11/Lecture11.pptx
@@ -221,7 +221,7 @@
           <a:p>
             <a:fld id="{634F3F22-B4BB-3F48-9180-464A9F2D66D1}" type="datetimeFigureOut">
               <a:rPr kumimoji="1" lang="zh-CN" altLang="en-US" smtClean="0"/>
-              <a:t>2025/4/22</a:t>
+              <a:t>2026/5/9</a:t>
             </a:fld>
             <a:endParaRPr kumimoji="1" lang="zh-CN" altLang="en-US"/>
           </a:p>
@@ -701,7 +701,7 @@
           <a:p>
             <a:fld id="{FC19A4FA-3D9A-4114-B0D5-759CBD56F1AB}" type="datetimeFigureOut">
               <a:rPr lang="zh-CN" altLang="en-US" smtClean="0"/>
-              <a:t>2025/4/22</a:t>
+              <a:t>2026/5/9</a:t>
             </a:fld>
             <a:endParaRPr lang="zh-CN" altLang="en-US"/>
           </a:p>
@@ -904,7 +904,7 @@
           <a:p>
             <a:fld id="{FC19A4FA-3D9A-4114-B0D5-759CBD56F1AB}" type="datetimeFigureOut">
               <a:rPr lang="zh-CN" altLang="en-US" smtClean="0"/>
-              <a:t>2025/4/22</a:t>
+              <a:t>2026/5/9</a:t>
             </a:fld>
             <a:endParaRPr lang="zh-CN" altLang="en-US"/>
           </a:p>
@@ -1082,7 +1082,7 @@
           <a:p>
             <a:fld id="{FC19A4FA-3D9A-4114-B0D5-759CBD56F1AB}" type="datetimeFigureOut">
               <a:rPr lang="zh-CN" altLang="en-US" smtClean="0"/>
-              <a:t>2025/4/22</a:t>
+              <a:t>2026/5/9</a:t>
             </a:fld>
             <a:endParaRPr lang="zh-CN" altLang="en-US"/>
           </a:p>
@@ -1306,7 +1306,7 @@
           <a:p>
             <a:fld id="{FC19A4FA-3D9A-4114-B0D5-759CBD56F1AB}" type="datetimeFigureOut">
               <a:rPr lang="zh-CN" altLang="en-US" smtClean="0"/>
-              <a:t>2025/4/22</a:t>
+              <a:t>2026/5/9</a:t>
             </a:fld>
             <a:endParaRPr lang="zh-CN" altLang="en-US"/>
           </a:p>
@@ -1540,7 +1540,7 @@
           <a:p>
             <a:fld id="{FC19A4FA-3D9A-4114-B0D5-759CBD56F1AB}" type="datetimeFigureOut">
               <a:rPr lang="zh-CN" altLang="en-US" smtClean="0"/>
-              <a:t>2025/4/22</a:t>
+              <a:t>2026/5/9</a:t>
             </a:fld>
             <a:endParaRPr lang="zh-CN" altLang="en-US"/>
           </a:p>
@@ -1939,7 +1939,7 @@
           <a:p>
             <a:fld id="{FC19A4FA-3D9A-4114-B0D5-759CBD56F1AB}" type="datetimeFigureOut">
               <a:rPr lang="zh-CN" altLang="en-US" smtClean="0"/>
-              <a:t>2025/4/22</a:t>
+              <a:t>2026/5/9</a:t>
             </a:fld>
             <a:endParaRPr lang="zh-CN" altLang="en-US"/>
           </a:p>
@@ -2219,7 +2219,7 @@
           <a:p>
             <a:fld id="{FC19A4FA-3D9A-4114-B0D5-759CBD56F1AB}" type="datetimeFigureOut">
               <a:rPr lang="zh-CN" altLang="en-US" smtClean="0"/>
-              <a:t>2025/4/22</a:t>
+              <a:t>2026/5/9</a:t>
             </a:fld>
             <a:endParaRPr lang="zh-CN" altLang="en-US"/>
           </a:p>
@@ -2371,7 +2371,7 @@
           <a:p>
             <a:fld id="{FC19A4FA-3D9A-4114-B0D5-759CBD56F1AB}" type="datetimeFigureOut">
               <a:rPr lang="zh-CN" altLang="en-US" smtClean="0"/>
-              <a:t>2025/4/22</a:t>
+              <a:t>2026/5/9</a:t>
             </a:fld>
             <a:endParaRPr lang="zh-CN" altLang="en-US"/>
           </a:p>
@@ -2501,7 +2501,7 @@
           <a:p>
             <a:fld id="{FC19A4FA-3D9A-4114-B0D5-759CBD56F1AB}" type="datetimeFigureOut">
               <a:rPr lang="zh-CN" altLang="en-US" smtClean="0"/>
-              <a:t>2025/4/22</a:t>
+              <a:t>2026/5/9</a:t>
             </a:fld>
             <a:endParaRPr lang="zh-CN" altLang="en-US"/>
           </a:p>
@@ -2811,7 +2811,7 @@
           <a:p>
             <a:fld id="{FC19A4FA-3D9A-4114-B0D5-759CBD56F1AB}" type="datetimeFigureOut">
               <a:rPr lang="zh-CN" altLang="en-US" smtClean="0"/>
-              <a:t>2025/4/22</a:t>
+              <a:t>2026/5/9</a:t>
             </a:fld>
             <a:endParaRPr lang="zh-CN" altLang="en-US"/>
           </a:p>
@@ -3098,7 +3098,7 @@
           <a:p>
             <a:fld id="{FC19A4FA-3D9A-4114-B0D5-759CBD56F1AB}" type="datetimeFigureOut">
               <a:rPr lang="zh-CN" altLang="en-US" smtClean="0"/>
-              <a:t>2025/4/22</a:t>
+              <a:t>2026/5/9</a:t>
             </a:fld>
             <a:endParaRPr lang="zh-CN" altLang="en-US"/>
           </a:p>
@@ -3391,7 +3391,7 @@
           <a:p>
             <a:fld id="{FC19A4FA-3D9A-4114-B0D5-759CBD56F1AB}" type="datetimeFigureOut">
               <a:rPr lang="zh-CN" altLang="en-US" smtClean="0"/>
-              <a:t>2025/4/22</a:t>
+              <a:t>2026/5/9</a:t>
             </a:fld>
             <a:endParaRPr lang="zh-CN" altLang="en-US"/>
           </a:p>
@@ -3819,7 +3819,7 @@
           <a:lstStyle/>
           <a:p>
             <a:r>
-              <a:rPr lang="en-US" altLang="zh-CN" b="1" dirty="0">
+              <a:rPr lang="en-US" altLang="zh-CN" b="1">
                 <a:latin typeface="Franklin Gothic Demi" panose="020B0703020102020204" pitchFamily="34" charset="0"/>
               </a:rPr>
               <a:t>Advanced Programming</a:t>
